--- a/ゲーム科2年/00_前期/ゲーム開発Ⅰ/13_継承を使ったエネミー管理.pptx
+++ b/ゲーム科2年/00_前期/ゲーム開発Ⅰ/13_継承を使ったエネミー管理.pptx
@@ -298,7 +298,7 @@
           <a:p>
             <a:fld id="{E9CC885B-4903-4D54-9A93-00025F12DED9}" type="datetimeFigureOut">
               <a:rPr kumimoji="1" lang="ja-JP" altLang="en-US" smtClean="0"/>
-              <a:t>2024/10/18</a:t>
+              <a:t>2025/2/7</a:t>
             </a:fld>
             <a:endParaRPr kumimoji="1" lang="ja-JP" altLang="en-US"/>
           </a:p>
@@ -528,7 +528,7 @@
           <a:p>
             <a:fld id="{E9CC885B-4903-4D54-9A93-00025F12DED9}" type="datetimeFigureOut">
               <a:rPr kumimoji="1" lang="ja-JP" altLang="en-US" smtClean="0"/>
-              <a:t>2024/10/18</a:t>
+              <a:t>2025/2/7</a:t>
             </a:fld>
             <a:endParaRPr kumimoji="1" lang="ja-JP" altLang="en-US"/>
           </a:p>
@@ -768,7 +768,7 @@
           <a:p>
             <a:fld id="{E9CC885B-4903-4D54-9A93-00025F12DED9}" type="datetimeFigureOut">
               <a:rPr kumimoji="1" lang="ja-JP" altLang="en-US" smtClean="0"/>
-              <a:t>2024/10/18</a:t>
+              <a:t>2025/2/7</a:t>
             </a:fld>
             <a:endParaRPr kumimoji="1" lang="ja-JP" altLang="en-US"/>
           </a:p>
@@ -998,7 +998,7 @@
           <a:p>
             <a:fld id="{E9CC885B-4903-4D54-9A93-00025F12DED9}" type="datetimeFigureOut">
               <a:rPr kumimoji="1" lang="ja-JP" altLang="en-US" smtClean="0"/>
-              <a:t>2024/10/18</a:t>
+              <a:t>2025/2/7</a:t>
             </a:fld>
             <a:endParaRPr kumimoji="1" lang="ja-JP" altLang="en-US"/>
           </a:p>
@@ -1273,7 +1273,7 @@
           <a:p>
             <a:fld id="{E9CC885B-4903-4D54-9A93-00025F12DED9}" type="datetimeFigureOut">
               <a:rPr kumimoji="1" lang="ja-JP" altLang="en-US" smtClean="0"/>
-              <a:t>2024/10/18</a:t>
+              <a:t>2025/2/7</a:t>
             </a:fld>
             <a:endParaRPr kumimoji="1" lang="ja-JP" altLang="en-US"/>
           </a:p>
@@ -1602,7 +1602,7 @@
           <a:p>
             <a:fld id="{E9CC885B-4903-4D54-9A93-00025F12DED9}" type="datetimeFigureOut">
               <a:rPr kumimoji="1" lang="ja-JP" altLang="en-US" smtClean="0"/>
-              <a:t>2024/10/18</a:t>
+              <a:t>2025/2/7</a:t>
             </a:fld>
             <a:endParaRPr kumimoji="1" lang="ja-JP" altLang="en-US"/>
           </a:p>
@@ -2078,7 +2078,7 @@
           <a:p>
             <a:fld id="{E9CC885B-4903-4D54-9A93-00025F12DED9}" type="datetimeFigureOut">
               <a:rPr kumimoji="1" lang="ja-JP" altLang="en-US" smtClean="0"/>
-              <a:t>2024/10/18</a:t>
+              <a:t>2025/2/7</a:t>
             </a:fld>
             <a:endParaRPr kumimoji="1" lang="ja-JP" altLang="en-US"/>
           </a:p>
@@ -2219,7 +2219,7 @@
           <a:p>
             <a:fld id="{E9CC885B-4903-4D54-9A93-00025F12DED9}" type="datetimeFigureOut">
               <a:rPr kumimoji="1" lang="ja-JP" altLang="en-US" smtClean="0"/>
-              <a:t>2024/10/18</a:t>
+              <a:t>2025/2/7</a:t>
             </a:fld>
             <a:endParaRPr kumimoji="1" lang="ja-JP" altLang="en-US"/>
           </a:p>
@@ -2332,7 +2332,7 @@
           <a:p>
             <a:fld id="{E9CC885B-4903-4D54-9A93-00025F12DED9}" type="datetimeFigureOut">
               <a:rPr kumimoji="1" lang="ja-JP" altLang="en-US" smtClean="0"/>
-              <a:t>2024/10/18</a:t>
+              <a:t>2025/2/7</a:t>
             </a:fld>
             <a:endParaRPr kumimoji="1" lang="ja-JP" altLang="en-US"/>
           </a:p>
@@ -2675,7 +2675,7 @@
           <a:p>
             <a:fld id="{E9CC885B-4903-4D54-9A93-00025F12DED9}" type="datetimeFigureOut">
               <a:rPr kumimoji="1" lang="ja-JP" altLang="en-US" smtClean="0"/>
-              <a:t>2024/10/18</a:t>
+              <a:t>2025/2/7</a:t>
             </a:fld>
             <a:endParaRPr kumimoji="1" lang="ja-JP" altLang="en-US"/>
           </a:p>
@@ -2963,7 +2963,7 @@
           <a:p>
             <a:fld id="{E9CC885B-4903-4D54-9A93-00025F12DED9}" type="datetimeFigureOut">
               <a:rPr kumimoji="1" lang="ja-JP" altLang="en-US" smtClean="0"/>
-              <a:t>2024/10/18</a:t>
+              <a:t>2025/2/7</a:t>
             </a:fld>
             <a:endParaRPr kumimoji="1" lang="ja-JP" altLang="en-US"/>
           </a:p>
@@ -3236,7 +3236,7 @@
           <a:p>
             <a:fld id="{E9CC885B-4903-4D54-9A93-00025F12DED9}" type="datetimeFigureOut">
               <a:rPr kumimoji="1" lang="ja-JP" altLang="en-US" smtClean="0"/>
-              <a:t>2024/10/18</a:t>
+              <a:t>2025/2/7</a:t>
             </a:fld>
             <a:endParaRPr kumimoji="1" lang="ja-JP" altLang="en-US"/>
           </a:p>
@@ -3860,7 +3860,7 @@
         <p:spPr>
           <a:xfrm>
             <a:off x="567542" y="1216429"/>
-            <a:ext cx="6992620" cy="461665"/>
+            <a:ext cx="7159332" cy="461665"/>
           </a:xfrm>
           <a:prstGeom prst="rect">
             <a:avLst/>
@@ -3874,7 +3874,11 @@
           <a:lstStyle/>
           <a:p>
             <a:r>
-              <a:rPr lang="en-US" altLang="ja-JP" sz="2400" dirty="0"/>
+              <a:rPr lang="en-US" altLang="ja-JP" sz="2400" b="1" dirty="0">
+                <a:solidFill>
+                  <a:srgbClr val="FF0000"/>
+                </a:solidFill>
+              </a:rPr>
               <a:t>EnemyManager.cpp</a:t>
             </a:r>
             <a:r>
@@ -4002,7 +4006,7 @@
         <p:spPr>
           <a:xfrm>
             <a:off x="567542" y="1216429"/>
-            <a:ext cx="6992620" cy="461665"/>
+            <a:ext cx="7159332" cy="461665"/>
           </a:xfrm>
           <a:prstGeom prst="rect">
             <a:avLst/>
@@ -4016,7 +4020,11 @@
           <a:lstStyle/>
           <a:p>
             <a:r>
-              <a:rPr lang="en-US" altLang="ja-JP" sz="2400" dirty="0"/>
+              <a:rPr lang="en-US" altLang="ja-JP" sz="2400" b="1" dirty="0">
+                <a:solidFill>
+                  <a:srgbClr val="FF0000"/>
+                </a:solidFill>
+              </a:rPr>
               <a:t>EnemyManager.cpp</a:t>
             </a:r>
             <a:r>
@@ -4144,7 +4152,7 @@
         <p:spPr>
           <a:xfrm>
             <a:off x="567542" y="1216429"/>
-            <a:ext cx="6992620" cy="461665"/>
+            <a:ext cx="7159332" cy="461665"/>
           </a:xfrm>
           <a:prstGeom prst="rect">
             <a:avLst/>
@@ -4158,7 +4166,11 @@
           <a:lstStyle/>
           <a:p>
             <a:r>
-              <a:rPr lang="en-US" altLang="ja-JP" sz="2400" dirty="0"/>
+              <a:rPr lang="en-US" altLang="ja-JP" sz="2400" b="1" dirty="0">
+                <a:solidFill>
+                  <a:srgbClr val="FF0000"/>
+                </a:solidFill>
+              </a:rPr>
               <a:t>EnemyManager.cpp</a:t>
             </a:r>
             <a:r>
@@ -4286,7 +4298,7 @@
         <p:spPr>
           <a:xfrm>
             <a:off x="567542" y="1216429"/>
-            <a:ext cx="6992620" cy="461665"/>
+            <a:ext cx="7159332" cy="461665"/>
           </a:xfrm>
           <a:prstGeom prst="rect">
             <a:avLst/>
@@ -4300,7 +4312,11 @@
           <a:lstStyle/>
           <a:p>
             <a:r>
-              <a:rPr lang="en-US" altLang="ja-JP" sz="2400" dirty="0"/>
+              <a:rPr lang="en-US" altLang="ja-JP" sz="2400" b="1" dirty="0">
+                <a:solidFill>
+                  <a:srgbClr val="FF0000"/>
+                </a:solidFill>
+              </a:rPr>
               <a:t>EnemyManager.cpp</a:t>
             </a:r>
             <a:r>
@@ -4326,7 +4342,7 @@
         <p:spPr>
           <a:xfrm>
             <a:off x="567542" y="5904381"/>
-            <a:ext cx="6088526" cy="461665"/>
+            <a:ext cx="6200736" cy="461665"/>
           </a:xfrm>
           <a:prstGeom prst="rect">
             <a:avLst/>
@@ -4340,12 +4356,24 @@
           <a:lstStyle/>
           <a:p>
             <a:r>
-              <a:rPr lang="en-US" altLang="ja-JP" sz="2400" dirty="0" err="1"/>
+              <a:rPr lang="en-US" altLang="ja-JP" sz="2400" b="1" dirty="0" err="1">
+                <a:solidFill>
+                  <a:srgbClr val="0070C0"/>
+                </a:solidFill>
+              </a:rPr>
               <a:t>CreateEnemy</a:t>
             </a:r>
             <a:r>
+              <a:rPr lang="ja-JP" altLang="en-US" sz="2400" b="1" dirty="0">
+                <a:solidFill>
+                  <a:srgbClr val="0070C0"/>
+                </a:solidFill>
+              </a:rPr>
+              <a:t>関数</a:t>
+            </a:r>
+            <a:r>
               <a:rPr lang="ja-JP" altLang="en-US" sz="2400" dirty="0"/>
-              <a:t>関数は後程処理を書きます。</a:t>
+              <a:t>は後程処理を書きます。</a:t>
             </a:r>
             <a:endParaRPr lang="en-US" altLang="ja-JP" sz="2400" dirty="0"/>
           </a:p>
@@ -5003,7 +5031,7 @@
         <p:spPr>
           <a:xfrm>
             <a:off x="567542" y="1216429"/>
-            <a:ext cx="4108817" cy="461665"/>
+            <a:ext cx="4216219" cy="461665"/>
           </a:xfrm>
           <a:prstGeom prst="rect">
             <a:avLst/>
@@ -5017,7 +5045,11 @@
           <a:lstStyle/>
           <a:p>
             <a:r>
-              <a:rPr lang="en-US" altLang="ja-JP" sz="2400" dirty="0" err="1"/>
+              <a:rPr lang="en-US" altLang="ja-JP" sz="2400" b="1" dirty="0" err="1">
+                <a:solidFill>
+                  <a:srgbClr val="FF0000"/>
+                </a:solidFill>
+              </a:rPr>
               <a:t>RedEnemy.h</a:t>
             </a:r>
             <a:r>
@@ -5145,7 +5177,7 @@
         <p:spPr>
           <a:xfrm>
             <a:off x="567542" y="1216429"/>
-            <a:ext cx="5984331" cy="461665"/>
+            <a:ext cx="6112571" cy="461665"/>
           </a:xfrm>
           <a:prstGeom prst="rect">
             <a:avLst/>
@@ -5159,7 +5191,11 @@
           <a:lstStyle/>
           <a:p>
             <a:r>
-              <a:rPr lang="en-US" altLang="ja-JP" sz="2400" dirty="0"/>
+              <a:rPr lang="en-US" altLang="ja-JP" sz="2400" b="1" dirty="0">
+                <a:solidFill>
+                  <a:srgbClr val="FF0000"/>
+                </a:solidFill>
+              </a:rPr>
               <a:t>RedEnemy.cpp</a:t>
             </a:r>
             <a:r>
@@ -5287,7 +5323,7 @@
         <p:spPr>
           <a:xfrm>
             <a:off x="567542" y="1216429"/>
-            <a:ext cx="5984331" cy="461665"/>
+            <a:ext cx="6112571" cy="461665"/>
           </a:xfrm>
           <a:prstGeom prst="rect">
             <a:avLst/>
@@ -5301,7 +5337,11 @@
           <a:lstStyle/>
           <a:p>
             <a:r>
-              <a:rPr lang="en-US" altLang="ja-JP" sz="2400" dirty="0"/>
+              <a:rPr lang="en-US" altLang="ja-JP" sz="2400" b="1" dirty="0">
+                <a:solidFill>
+                  <a:srgbClr val="FF0000"/>
+                </a:solidFill>
+              </a:rPr>
               <a:t>RedEnemy.cpp</a:t>
             </a:r>
             <a:r>
@@ -5429,7 +5469,7 @@
         <p:spPr>
           <a:xfrm>
             <a:off x="567542" y="1216429"/>
-            <a:ext cx="4193777" cy="461665"/>
+            <a:ext cx="4309193" cy="461665"/>
           </a:xfrm>
           <a:prstGeom prst="rect">
             <a:avLst/>
@@ -5443,7 +5483,11 @@
           <a:lstStyle/>
           <a:p>
             <a:r>
-              <a:rPr lang="en-US" altLang="ja-JP" sz="2400" dirty="0" err="1"/>
+              <a:rPr lang="en-US" altLang="ja-JP" sz="2400" b="1" dirty="0" err="1">
+                <a:solidFill>
+                  <a:srgbClr val="FF0000"/>
+                </a:solidFill>
+              </a:rPr>
               <a:t>BlueEnemy.h</a:t>
             </a:r>
             <a:r>
@@ -5571,7 +5615,7 @@
         <p:spPr>
           <a:xfrm>
             <a:off x="567542" y="1216429"/>
-            <a:ext cx="6069290" cy="461665"/>
+            <a:ext cx="6205545" cy="461665"/>
           </a:xfrm>
           <a:prstGeom prst="rect">
             <a:avLst/>
@@ -5585,7 +5629,11 @@
           <a:lstStyle/>
           <a:p>
             <a:r>
-              <a:rPr lang="en-US" altLang="ja-JP" sz="2400" dirty="0"/>
+              <a:rPr lang="en-US" altLang="ja-JP" sz="2400" b="1" dirty="0">
+                <a:solidFill>
+                  <a:srgbClr val="FF0000"/>
+                </a:solidFill>
+              </a:rPr>
               <a:t>BlueEnemy.cpp</a:t>
             </a:r>
             <a:r>
@@ -5975,7 +6023,7 @@
         <p:spPr>
           <a:xfrm>
             <a:off x="567542" y="1216429"/>
-            <a:ext cx="6069290" cy="461665"/>
+            <a:ext cx="6205545" cy="461665"/>
           </a:xfrm>
           <a:prstGeom prst="rect">
             <a:avLst/>
@@ -5989,7 +6037,11 @@
           <a:lstStyle/>
           <a:p>
             <a:r>
-              <a:rPr lang="en-US" altLang="ja-JP" sz="2400" dirty="0"/>
+              <a:rPr lang="en-US" altLang="ja-JP" sz="2400" b="1" dirty="0">
+                <a:solidFill>
+                  <a:srgbClr val="FF0000"/>
+                </a:solidFill>
+              </a:rPr>
               <a:t>BlueEnemy.cpp</a:t>
             </a:r>
             <a:r>
@@ -6117,7 +6169,7 @@
         <p:spPr>
           <a:xfrm>
             <a:off x="567542" y="1216429"/>
-            <a:ext cx="6069290" cy="461665"/>
+            <a:ext cx="6205545" cy="461665"/>
           </a:xfrm>
           <a:prstGeom prst="rect">
             <a:avLst/>
@@ -6131,7 +6183,11 @@
           <a:lstStyle/>
           <a:p>
             <a:r>
-              <a:rPr lang="en-US" altLang="ja-JP" sz="2400" dirty="0"/>
+              <a:rPr lang="en-US" altLang="ja-JP" sz="2400" b="1" dirty="0">
+                <a:solidFill>
+                  <a:srgbClr val="FF0000"/>
+                </a:solidFill>
+              </a:rPr>
               <a:t>BlueEnemy.cpp</a:t>
             </a:r>
             <a:r>
@@ -6259,7 +6315,7 @@
         <p:spPr>
           <a:xfrm>
             <a:off x="567542" y="1216429"/>
-            <a:ext cx="9454832" cy="461665"/>
+            <a:ext cx="9621545" cy="461665"/>
           </a:xfrm>
           <a:prstGeom prst="rect">
             <a:avLst/>
@@ -6273,7 +6329,11 @@
           <a:lstStyle/>
           <a:p>
             <a:r>
-              <a:rPr lang="en-US" altLang="ja-JP" sz="2400" dirty="0"/>
+              <a:rPr lang="en-US" altLang="ja-JP" sz="2400" b="1" dirty="0">
+                <a:solidFill>
+                  <a:srgbClr val="FF0000"/>
+                </a:solidFill>
+              </a:rPr>
               <a:t>EnemyManager.cpp</a:t>
             </a:r>
             <a:r>
@@ -6401,7 +6461,7 @@
         <p:spPr>
           <a:xfrm>
             <a:off x="567542" y="1216429"/>
-            <a:ext cx="8279831" cy="461665"/>
+            <a:ext cx="8558753" cy="461665"/>
           </a:xfrm>
           <a:prstGeom prst="rect">
             <a:avLst/>
@@ -6415,7 +6475,11 @@
           <a:lstStyle/>
           <a:p>
             <a:r>
-              <a:rPr lang="en-US" altLang="ja-JP" sz="2400" dirty="0"/>
+              <a:rPr lang="en-US" altLang="ja-JP" sz="2400" b="1" dirty="0">
+                <a:solidFill>
+                  <a:srgbClr val="FF0000"/>
+                </a:solidFill>
+              </a:rPr>
               <a:t>EnemyManager.cpp</a:t>
             </a:r>
             <a:r>
@@ -6423,7 +6487,7 @@
               <a:t>の</a:t>
             </a:r>
             <a:r>
-              <a:rPr lang="en-US" altLang="ja-JP" sz="2400" dirty="0" err="1">
+              <a:rPr lang="en-US" altLang="ja-JP" sz="2400" b="1" dirty="0" err="1">
                 <a:solidFill>
                   <a:srgbClr val="0070C0"/>
                 </a:solidFill>
@@ -6431,7 +6495,7 @@
               <a:t>CreateEnemy</a:t>
             </a:r>
             <a:r>
-              <a:rPr lang="ja-JP" altLang="en-US" sz="2400" dirty="0">
+              <a:rPr lang="ja-JP" altLang="en-US" sz="2400" b="1" dirty="0">
                 <a:solidFill>
                   <a:srgbClr val="0070C0"/>
                 </a:solidFill>
@@ -6563,7 +6627,7 @@
         <p:spPr>
           <a:xfrm>
             <a:off x="567542" y="1216429"/>
-            <a:ext cx="7321235" cy="461665"/>
+            <a:ext cx="7447873" cy="461665"/>
           </a:xfrm>
           <a:prstGeom prst="rect">
             <a:avLst/>
@@ -6581,9 +6645,9 @@
               <a:t>クローン元は</a:t>
             </a:r>
             <a:r>
-              <a:rPr lang="en-US" altLang="ja-JP" sz="2400" dirty="0" err="1">
+              <a:rPr lang="en-US" altLang="ja-JP" sz="2400" b="1" dirty="0" err="1">
                 <a:solidFill>
-                  <a:srgbClr val="0070C0"/>
+                  <a:srgbClr val="00B050"/>
                 </a:solidFill>
               </a:rPr>
               <a:t>EnemyManager</a:t>
@@ -6869,7 +6933,7 @@
               <a:t>エネミーを生成するときは</a:t>
             </a:r>
             <a:r>
-              <a:rPr lang="en-US" altLang="ja-JP" sz="2400" dirty="0">
+              <a:rPr lang="en-US" altLang="ja-JP" sz="2400" b="1" dirty="0">
                 <a:solidFill>
                   <a:srgbClr val="0070C0"/>
                 </a:solidFill>
@@ -6877,7 +6941,7 @@
               <a:t>Clone</a:t>
             </a:r>
             <a:r>
-              <a:rPr lang="ja-JP" altLang="en-US" sz="2400" dirty="0">
+              <a:rPr lang="ja-JP" altLang="en-US" sz="2400" b="1" dirty="0">
                 <a:solidFill>
                   <a:srgbClr val="0070C0"/>
                 </a:solidFill>
@@ -7009,7 +7073,7 @@
         <p:spPr>
           <a:xfrm>
             <a:off x="567542" y="1216429"/>
-            <a:ext cx="7646645" cy="461665"/>
+            <a:ext cx="7726795" cy="461665"/>
           </a:xfrm>
           <a:prstGeom prst="rect">
             <a:avLst/>
@@ -7023,7 +7087,11 @@
           <a:lstStyle/>
           <a:p>
             <a:r>
-              <a:rPr lang="en-US" altLang="ja-JP" sz="2400" dirty="0"/>
+              <a:rPr lang="en-US" altLang="ja-JP" sz="2400" b="1" dirty="0">
+                <a:solidFill>
+                  <a:srgbClr val="FF0000"/>
+                </a:solidFill>
+              </a:rPr>
               <a:t>Main.cpp</a:t>
             </a:r>
             <a:r>
@@ -7085,7 +7153,7 @@
         <p:spPr>
           <a:xfrm>
             <a:off x="567541" y="5329815"/>
-            <a:ext cx="10709983" cy="461665"/>
+            <a:ext cx="10828605" cy="461665"/>
           </a:xfrm>
           <a:prstGeom prst="rect">
             <a:avLst/>
@@ -7099,9 +7167,9 @@
           <a:lstStyle/>
           <a:p>
             <a:r>
-              <a:rPr lang="en-US" altLang="ja-JP" sz="2400" dirty="0" err="1">
+              <a:rPr lang="en-US" altLang="ja-JP" sz="2400" b="1" dirty="0" err="1">
                 <a:solidFill>
-                  <a:srgbClr val="0070C0"/>
+                  <a:srgbClr val="00B050"/>
                 </a:solidFill>
               </a:rPr>
               <a:t>EnemyManger</a:t>
@@ -7111,7 +7179,7 @@
               <a:t>の</a:t>
             </a:r>
             <a:r>
-              <a:rPr lang="en-US" altLang="ja-JP" sz="2400" dirty="0">
+              <a:rPr lang="en-US" altLang="ja-JP" sz="2400" b="1" dirty="0">
                 <a:solidFill>
                   <a:srgbClr val="0070C0"/>
                 </a:solidFill>
@@ -7119,7 +7187,7 @@
               <a:t>Step</a:t>
             </a:r>
             <a:r>
-              <a:rPr lang="ja-JP" altLang="en-US" sz="2400" dirty="0">
+              <a:rPr lang="ja-JP" altLang="en-US" sz="2400" b="1" dirty="0">
                 <a:solidFill>
                   <a:srgbClr val="0070C0"/>
                 </a:solidFill>
@@ -7127,7 +7195,7 @@
               <a:t>～</a:t>
             </a:r>
             <a:r>
-              <a:rPr lang="en-US" altLang="ja-JP" sz="2400" dirty="0">
+              <a:rPr lang="en-US" altLang="ja-JP" sz="2400" b="1" dirty="0">
                 <a:solidFill>
                   <a:srgbClr val="0070C0"/>
                 </a:solidFill>
@@ -7135,7 +7203,7 @@
               <a:t>Fin</a:t>
             </a:r>
             <a:r>
-              <a:rPr lang="ja-JP" altLang="en-US" sz="2400" dirty="0">
+              <a:rPr lang="ja-JP" altLang="en-US" sz="2400" b="1" dirty="0">
                 <a:solidFill>
                   <a:srgbClr val="0070C0"/>
                 </a:solidFill>
@@ -7245,17 +7313,17 @@
           <a:lstStyle/>
           <a:p>
             <a:r>
-              <a:rPr lang="en-US" altLang="ja-JP" sz="2400" dirty="0">
+              <a:rPr lang="en-US" altLang="ja-JP" sz="2400" b="1" dirty="0">
                 <a:solidFill>
-                  <a:srgbClr val="0070C0"/>
+                  <a:srgbClr val="00B050"/>
                 </a:solidFill>
               </a:rPr>
               <a:t>list</a:t>
             </a:r>
             <a:r>
-              <a:rPr lang="ja-JP" altLang="en-US" sz="2400" dirty="0">
+              <a:rPr lang="ja-JP" altLang="en-US" sz="2400" b="1" dirty="0">
                 <a:solidFill>
-                  <a:srgbClr val="0070C0"/>
+                  <a:srgbClr val="00B050"/>
                 </a:solidFill>
               </a:rPr>
               <a:t>クラス</a:t>
@@ -7496,7 +7564,7 @@
         <p:spPr>
           <a:xfrm>
             <a:off x="567542" y="1216429"/>
-            <a:ext cx="5973110" cy="461665"/>
+            <a:ext cx="6083717" cy="461665"/>
           </a:xfrm>
           <a:prstGeom prst="rect">
             <a:avLst/>
@@ -7510,7 +7578,11 @@
           <a:lstStyle/>
           <a:p>
             <a:r>
-              <a:rPr lang="en-US" altLang="ja-JP" sz="2400" dirty="0" err="1"/>
+              <a:rPr lang="en-US" altLang="ja-JP" sz="2400" b="1" dirty="0" err="1">
+                <a:solidFill>
+                  <a:srgbClr val="FF0000"/>
+                </a:solidFill>
+              </a:rPr>
               <a:t>EnemyBase.h</a:t>
             </a:r>
             <a:r>
@@ -7646,7 +7718,7 @@
         <p:spPr>
           <a:xfrm>
             <a:off x="567542" y="1216429"/>
-            <a:ext cx="5973110" cy="461665"/>
+            <a:ext cx="6083717" cy="461665"/>
           </a:xfrm>
           <a:prstGeom prst="rect">
             <a:avLst/>
@@ -7660,7 +7732,11 @@
           <a:lstStyle/>
           <a:p>
             <a:r>
-              <a:rPr lang="en-US" altLang="ja-JP" sz="2400" dirty="0" err="1"/>
+              <a:rPr lang="en-US" altLang="ja-JP" sz="2400" b="1" dirty="0" err="1">
+                <a:solidFill>
+                  <a:srgbClr val="FF0000"/>
+                </a:solidFill>
+              </a:rPr>
               <a:t>EnemyBase.h</a:t>
             </a:r>
             <a:r>
@@ -7796,7 +7872,7 @@
         <p:spPr>
           <a:xfrm>
             <a:off x="567542" y="1216429"/>
-            <a:ext cx="6445995" cy="461665"/>
+            <a:ext cx="6577442" cy="461665"/>
           </a:xfrm>
           <a:prstGeom prst="rect">
             <a:avLst/>
@@ -7810,7 +7886,11 @@
           <a:lstStyle/>
           <a:p>
             <a:r>
-              <a:rPr lang="en-US" altLang="ja-JP" sz="2400" dirty="0"/>
+              <a:rPr lang="en-US" altLang="ja-JP" sz="2400" b="1" dirty="0">
+                <a:solidFill>
+                  <a:srgbClr val="FF0000"/>
+                </a:solidFill>
+              </a:rPr>
               <a:t>EnemyBase.cpp</a:t>
             </a:r>
             <a:r>
@@ -7938,7 +8018,7 @@
         <p:spPr>
           <a:xfrm>
             <a:off x="567542" y="1216429"/>
-            <a:ext cx="6445995" cy="461665"/>
+            <a:ext cx="6577442" cy="461665"/>
           </a:xfrm>
           <a:prstGeom prst="rect">
             <a:avLst/>
@@ -7952,7 +8032,11 @@
           <a:lstStyle/>
           <a:p>
             <a:r>
-              <a:rPr lang="en-US" altLang="ja-JP" sz="2400" dirty="0"/>
+              <a:rPr lang="en-US" altLang="ja-JP" sz="2400" b="1" dirty="0">
+                <a:solidFill>
+                  <a:srgbClr val="FF0000"/>
+                </a:solidFill>
+              </a:rPr>
               <a:t>EnemyBase.cpp</a:t>
             </a:r>
             <a:r>
@@ -8098,7 +8182,7 @@
               <a:t>今回は</a:t>
             </a:r>
             <a:r>
-              <a:rPr lang="en-US" altLang="ja-JP" sz="2400" dirty="0">
+              <a:rPr lang="en-US" altLang="ja-JP" sz="2400" b="1" dirty="0">
                 <a:solidFill>
                   <a:srgbClr val="0070C0"/>
                 </a:solidFill>
@@ -8106,7 +8190,7 @@
               <a:t>Update</a:t>
             </a:r>
             <a:r>
-              <a:rPr lang="ja-JP" altLang="en-US" sz="2400" dirty="0">
+              <a:rPr lang="ja-JP" altLang="en-US" sz="2400" b="1" dirty="0">
                 <a:solidFill>
                   <a:srgbClr val="0070C0"/>
                 </a:solidFill>
@@ -8114,7 +8198,7 @@
               <a:t>関数～</a:t>
             </a:r>
             <a:r>
-              <a:rPr lang="en-US" altLang="ja-JP" sz="2400" dirty="0">
+              <a:rPr lang="en-US" altLang="ja-JP" sz="2400" b="1" dirty="0">
                 <a:solidFill>
                   <a:srgbClr val="0070C0"/>
                 </a:solidFill>
@@ -8122,7 +8206,7 @@
               <a:t>Fin</a:t>
             </a:r>
             <a:r>
-              <a:rPr lang="ja-JP" altLang="en-US" sz="2400" dirty="0">
+              <a:rPr lang="ja-JP" altLang="en-US" sz="2400" b="1" dirty="0">
                 <a:solidFill>
                   <a:srgbClr val="0070C0"/>
                 </a:solidFill>
@@ -8137,9 +8221,9 @@
           </a:p>
           <a:p>
             <a:r>
-              <a:rPr lang="en-US" altLang="ja-JP" sz="2400" dirty="0" err="1">
+              <a:rPr lang="en-US" altLang="ja-JP" sz="2400" b="1" dirty="0" err="1">
                 <a:solidFill>
-                  <a:srgbClr val="0070C0"/>
+                  <a:srgbClr val="00B050"/>
                 </a:solidFill>
               </a:rPr>
               <a:t>EnemyBase</a:t>
@@ -8305,7 +8389,7 @@
         <p:spPr>
           <a:xfrm>
             <a:off x="567542" y="1216429"/>
-            <a:ext cx="6655989" cy="461665"/>
+            <a:ext cx="6801862" cy="461665"/>
           </a:xfrm>
           <a:prstGeom prst="rect">
             <a:avLst/>
@@ -8319,7 +8403,11 @@
           <a:lstStyle/>
           <a:p>
             <a:r>
-              <a:rPr lang="en-US" altLang="ja-JP" sz="2400" dirty="0" err="1"/>
+              <a:rPr lang="en-US" altLang="ja-JP" sz="2400" b="1" dirty="0" err="1">
+                <a:solidFill>
+                  <a:srgbClr val="FF0000"/>
+                </a:solidFill>
+              </a:rPr>
               <a:t>EnemyManager.h</a:t>
             </a:r>
             <a:r>
@@ -8447,7 +8535,7 @@
         <p:spPr>
           <a:xfrm>
             <a:off x="567542" y="1216429"/>
-            <a:ext cx="6655989" cy="461665"/>
+            <a:ext cx="6801862" cy="461665"/>
           </a:xfrm>
           <a:prstGeom prst="rect">
             <a:avLst/>
@@ -8461,7 +8549,11 @@
           <a:lstStyle/>
           <a:p>
             <a:r>
-              <a:rPr lang="en-US" altLang="ja-JP" sz="2400" dirty="0" err="1"/>
+              <a:rPr lang="en-US" altLang="ja-JP" sz="2400" b="1" dirty="0" err="1">
+                <a:solidFill>
+                  <a:srgbClr val="FF0000"/>
+                </a:solidFill>
+              </a:rPr>
               <a:t>EnemyManager.h</a:t>
             </a:r>
             <a:r>
